--- a/public/Logo.pptx
+++ b/public/Logo.pptx
@@ -270,7 +270,7 @@
           <a:p>
             <a:fld id="{369C0DA2-4379-472D-8E50-428F992CD64B}" type="datetimeFigureOut">
               <a:rPr lang="de-DE" smtClean="0"/>
-              <a:t>06.08.2026</a:t>
+              <a:t>15.08.2026</a:t>
             </a:fld>
             <a:endParaRPr lang="de-DE"/>
           </a:p>
@@ -468,7 +468,7 @@
           <a:p>
             <a:fld id="{369C0DA2-4379-472D-8E50-428F992CD64B}" type="datetimeFigureOut">
               <a:rPr lang="de-DE" smtClean="0"/>
-              <a:t>06.08.2026</a:t>
+              <a:t>15.08.2026</a:t>
             </a:fld>
             <a:endParaRPr lang="de-DE"/>
           </a:p>
@@ -676,7 +676,7 @@
           <a:p>
             <a:fld id="{369C0DA2-4379-472D-8E50-428F992CD64B}" type="datetimeFigureOut">
               <a:rPr lang="de-DE" smtClean="0"/>
-              <a:t>06.08.2026</a:t>
+              <a:t>15.08.2026</a:t>
             </a:fld>
             <a:endParaRPr lang="de-DE"/>
           </a:p>
@@ -874,7 +874,7 @@
           <a:p>
             <a:fld id="{369C0DA2-4379-472D-8E50-428F992CD64B}" type="datetimeFigureOut">
               <a:rPr lang="de-DE" smtClean="0"/>
-              <a:t>06.08.2026</a:t>
+              <a:t>15.08.2026</a:t>
             </a:fld>
             <a:endParaRPr lang="de-DE"/>
           </a:p>
@@ -1149,7 +1149,7 @@
           <a:p>
             <a:fld id="{369C0DA2-4379-472D-8E50-428F992CD64B}" type="datetimeFigureOut">
               <a:rPr lang="de-DE" smtClean="0"/>
-              <a:t>06.08.2026</a:t>
+              <a:t>15.08.2026</a:t>
             </a:fld>
             <a:endParaRPr lang="de-DE"/>
           </a:p>
@@ -1414,7 +1414,7 @@
           <a:p>
             <a:fld id="{369C0DA2-4379-472D-8E50-428F992CD64B}" type="datetimeFigureOut">
               <a:rPr lang="de-DE" smtClean="0"/>
-              <a:t>06.08.2026</a:t>
+              <a:t>15.08.2026</a:t>
             </a:fld>
             <a:endParaRPr lang="de-DE"/>
           </a:p>
@@ -1826,7 +1826,7 @@
           <a:p>
             <a:fld id="{369C0DA2-4379-472D-8E50-428F992CD64B}" type="datetimeFigureOut">
               <a:rPr lang="de-DE" smtClean="0"/>
-              <a:t>06.08.2026</a:t>
+              <a:t>15.08.2026</a:t>
             </a:fld>
             <a:endParaRPr lang="de-DE"/>
           </a:p>
@@ -1967,7 +1967,7 @@
           <a:p>
             <a:fld id="{369C0DA2-4379-472D-8E50-428F992CD64B}" type="datetimeFigureOut">
               <a:rPr lang="de-DE" smtClean="0"/>
-              <a:t>06.08.2026</a:t>
+              <a:t>15.08.2026</a:t>
             </a:fld>
             <a:endParaRPr lang="de-DE"/>
           </a:p>
@@ -2080,7 +2080,7 @@
           <a:p>
             <a:fld id="{369C0DA2-4379-472D-8E50-428F992CD64B}" type="datetimeFigureOut">
               <a:rPr lang="de-DE" smtClean="0"/>
-              <a:t>06.08.2026</a:t>
+              <a:t>15.08.2026</a:t>
             </a:fld>
             <a:endParaRPr lang="de-DE"/>
           </a:p>
@@ -2391,7 +2391,7 @@
           <a:p>
             <a:fld id="{369C0DA2-4379-472D-8E50-428F992CD64B}" type="datetimeFigureOut">
               <a:rPr lang="de-DE" smtClean="0"/>
-              <a:t>06.08.2026</a:t>
+              <a:t>15.08.2026</a:t>
             </a:fld>
             <a:endParaRPr lang="de-DE"/>
           </a:p>
@@ -2679,7 +2679,7 @@
           <a:p>
             <a:fld id="{369C0DA2-4379-472D-8E50-428F992CD64B}" type="datetimeFigureOut">
               <a:rPr lang="de-DE" smtClean="0"/>
-              <a:t>06.08.2026</a:t>
+              <a:t>15.08.2026</a:t>
             </a:fld>
             <a:endParaRPr lang="de-DE"/>
           </a:p>
@@ -2920,7 +2920,7 @@
           <a:p>
             <a:fld id="{369C0DA2-4379-472D-8E50-428F992CD64B}" type="datetimeFigureOut">
               <a:rPr lang="de-DE" smtClean="0"/>
-              <a:t>06.08.2026</a:t>
+              <a:t>15.08.2026</a:t>
             </a:fld>
             <a:endParaRPr lang="de-DE"/>
           </a:p>
@@ -3351,8 +3351,8 @@
         </p:nvSpPr>
         <p:spPr>
           <a:xfrm>
-            <a:off x="3116026" y="1302767"/>
-            <a:ext cx="720000" cy="720000"/>
+            <a:off x="3229072" y="1417067"/>
+            <a:ext cx="504000" cy="504000"/>
           </a:xfrm>
           <a:prstGeom prst="ellipse">
             <a:avLst/>
@@ -3405,13 +3405,13 @@
         </p:nvCxnSpPr>
         <p:spPr>
           <a:xfrm flipV="1">
-            <a:off x="2748929" y="1628920"/>
+            <a:off x="2770605" y="1613240"/>
             <a:ext cx="720843" cy="1074737"/>
           </a:xfrm>
           <a:prstGeom prst="line">
             <a:avLst/>
           </a:prstGeom>
-          <a:ln w="254000" cap="rnd">
+          <a:ln w="177800" cap="rnd">
             <a:solidFill>
               <a:schemeClr val="tx1"/>
             </a:solidFill>
@@ -3454,7 +3454,7 @@
           <a:prstGeom prst="line">
             <a:avLst/>
           </a:prstGeom>
-          <a:ln w="254000" cap="rnd">
+          <a:ln w="177800" cap="rnd">
             <a:solidFill>
               <a:schemeClr val="tx1"/>
             </a:solidFill>
@@ -3497,7 +3497,7 @@
           <a:prstGeom prst="line">
             <a:avLst/>
           </a:prstGeom>
-          <a:ln w="254000" cap="rnd">
+          <a:ln w="177800" cap="rnd">
             <a:solidFill>
               <a:schemeClr val="tx1"/>
             </a:solidFill>
@@ -3540,7 +3540,7 @@
           <a:prstGeom prst="line">
             <a:avLst/>
           </a:prstGeom>
-          <a:ln w="254000" cap="rnd">
+          <a:ln w="177800" cap="rnd">
             <a:solidFill>
               <a:schemeClr val="tx1"/>
             </a:solidFill>
@@ -3626,7 +3626,7 @@
           <a:prstGeom prst="line">
             <a:avLst/>
           </a:prstGeom>
-          <a:ln w="254000" cap="rnd">
+          <a:ln w="177800" cap="rnd">
             <a:solidFill>
               <a:schemeClr val="tx1"/>
             </a:solidFill>
@@ -3661,8 +3661,8 @@
         </p:nvSpPr>
         <p:spPr>
           <a:xfrm>
-            <a:off x="4518238" y="2124062"/>
-            <a:ext cx="720000" cy="720000"/>
+            <a:off x="4670294" y="2232062"/>
+            <a:ext cx="504000" cy="504000"/>
           </a:xfrm>
           <a:prstGeom prst="ellipse">
             <a:avLst/>
@@ -3713,8 +3713,8 @@
         </p:nvSpPr>
         <p:spPr>
           <a:xfrm>
-            <a:off x="1816277" y="2126367"/>
-            <a:ext cx="720000" cy="720000"/>
+            <a:off x="2031419" y="2130730"/>
+            <a:ext cx="504000" cy="504000"/>
           </a:xfrm>
           <a:prstGeom prst="ellipse">
             <a:avLst/>
@@ -3765,8 +3765,8 @@
         </p:nvSpPr>
         <p:spPr>
           <a:xfrm>
-            <a:off x="2432469" y="2408123"/>
-            <a:ext cx="720000" cy="720000"/>
+            <a:off x="2534107" y="2435977"/>
+            <a:ext cx="504000" cy="504000"/>
           </a:xfrm>
           <a:prstGeom prst="ellipse">
             <a:avLst/>
@@ -3817,8 +3817,8 @@
         </p:nvSpPr>
         <p:spPr>
           <a:xfrm>
-            <a:off x="3848041" y="2381349"/>
-            <a:ext cx="720000" cy="720000"/>
+            <a:off x="3943516" y="2435977"/>
+            <a:ext cx="504000" cy="504000"/>
           </a:xfrm>
           <a:prstGeom prst="ellipse">
             <a:avLst/>
@@ -3877,7 +3877,7 @@
           <a:prstGeom prst="line">
             <a:avLst/>
           </a:prstGeom>
-          <a:ln w="254000" cap="rnd">
+          <a:ln w="177800" cap="rnd">
             <a:solidFill>
               <a:schemeClr val="tx1"/>
             </a:solidFill>
@@ -3920,7 +3920,7 @@
           <a:prstGeom prst="line">
             <a:avLst/>
           </a:prstGeom>
-          <a:ln w="254000" cap="rnd">
+          <a:ln w="177800" cap="rnd">
             <a:solidFill>
               <a:schemeClr val="tx1"/>
             </a:solidFill>
@@ -4040,9 +4040,9 @@
             </a:pathLst>
           </a:custGeom>
           <a:noFill/>
-          <a:ln w="254000" cap="rnd">
+          <a:ln w="177800" cap="rnd">
             <a:solidFill>
-              <a:srgbClr val="00FFFF"/>
+              <a:schemeClr val="tx1"/>
             </a:solidFill>
           </a:ln>
         </p:spPr>
@@ -4170,9 +4170,9 @@
             </a:pathLst>
           </a:custGeom>
           <a:noFill/>
-          <a:ln w="254000" cap="rnd">
+          <a:ln w="177800" cap="rnd">
             <a:solidFill>
-              <a:srgbClr val="00FFFF"/>
+              <a:schemeClr val="tx1"/>
             </a:solidFill>
           </a:ln>
         </p:spPr>
@@ -4253,6 +4253,49 @@
           </a:p>
         </p:txBody>
       </p:sp>
+      <p:cxnSp>
+        <p:nvCxnSpPr>
+          <p:cNvPr id="18" name="Gerader Verbinder 17">
+            <a:extLst>
+              <a:ext uri="{FF2B5EF4-FFF2-40B4-BE49-F238E27FC236}">
+                <a16:creationId xmlns:a16="http://schemas.microsoft.com/office/drawing/2014/main" id="{42CB838F-A1C4-41F9-9050-198DBA83CAD2}"/>
+              </a:ext>
+            </a:extLst>
+          </p:cNvPr>
+          <p:cNvCxnSpPr>
+            <a:cxnSpLocks/>
+          </p:cNvCxnSpPr>
+          <p:nvPr/>
+        </p:nvCxnSpPr>
+        <p:spPr>
+          <a:xfrm>
+            <a:off x="2344904" y="2405324"/>
+            <a:ext cx="417629" cy="297418"/>
+          </a:xfrm>
+          <a:prstGeom prst="line">
+            <a:avLst/>
+          </a:prstGeom>
+          <a:ln w="177800" cap="rnd">
+            <a:solidFill>
+              <a:schemeClr val="tx1"/>
+            </a:solidFill>
+          </a:ln>
+        </p:spPr>
+        <p:style>
+          <a:lnRef idx="1">
+            <a:schemeClr val="accent1"/>
+          </a:lnRef>
+          <a:fillRef idx="0">
+            <a:schemeClr val="accent1"/>
+          </a:fillRef>
+          <a:effectRef idx="0">
+            <a:schemeClr val="accent1"/>
+          </a:effectRef>
+          <a:fontRef idx="minor">
+            <a:schemeClr val="tx1"/>
+          </a:fontRef>
+        </p:style>
+      </p:cxnSp>
     </p:spTree>
     <p:extLst>
       <p:ext uri="{BB962C8B-B14F-4D97-AF65-F5344CB8AC3E}">
